--- a/docs/business-card/CLS別府_名刺.pptx
+++ b/docs/business-card/CLS別府_名刺.pptx
@@ -3106,7 +3106,7 @@
         <p:spPr>
           <a:xfrm>
             <a:off x="216000" y="180000"/>
-            <a:ext cx="972000" cy="418255"/>
+            <a:ext cx="1080000" cy="432129"/>
           </a:xfrm>
           <a:prstGeom prst="rect">
             <a:avLst/>
@@ -3202,7 +3202,7 @@
             <a:avLst/>
           </a:prstGeom>
           <a:solidFill>
-            <a:srgbClr val="B03424"/>
+            <a:srgbClr val="B53128"/>
           </a:solidFill>
           <a:ln>
             <a:noFill/>
@@ -3257,7 +3257,7 @@
             <a:r>
               <a:rPr sz="650" b="1" spc="120">
                 <a:solidFill>
-                  <a:srgbClr val="B03424"/>
+                  <a:srgbClr val="B53128"/>
                 </a:solidFill>
                 <a:latin typeface="游ゴシック"/>
                 <a:ea typeface="游ゴシック"/>
@@ -3523,7 +3523,7 @@
             <a:avLst/>
           </a:prstGeom>
           <a:solidFill>
-            <a:srgbClr val="B03424"/>
+            <a:srgbClr val="B53128"/>
           </a:solidFill>
           <a:ln>
             <a:noFill/>
@@ -3586,8 +3586,8 @@
         </p:blipFill>
         <p:spPr>
           <a:xfrm>
-            <a:off x="216000" y="165600"/>
-            <a:ext cx="756000" cy="325309"/>
+            <a:off x="216000" y="187200"/>
+            <a:ext cx="864000" cy="345703"/>
           </a:xfrm>
           <a:prstGeom prst="rect">
             <a:avLst/>
@@ -3692,7 +3692,7 @@
             </a:avLst>
           </a:prstGeom>
           <a:solidFill>
-            <a:srgbClr val="B03424"/>
+            <a:srgbClr val="B53128"/>
           </a:solidFill>
           <a:ln>
             <a:noFill/>
@@ -3827,7 +3827,7 @@
             </a:avLst>
           </a:prstGeom>
           <a:solidFill>
-            <a:srgbClr val="1F4C97"/>
+            <a:srgbClr val="344FA9"/>
           </a:solidFill>
           <a:ln>
             <a:noFill/>
@@ -3962,7 +3962,7 @@
             </a:avLst>
           </a:prstGeom>
           <a:solidFill>
-            <a:srgbClr val="187339"/>
+            <a:srgbClr val="34793C"/>
           </a:solidFill>
           <a:ln>
             <a:noFill/>
@@ -4097,7 +4097,7 @@
             </a:avLst>
           </a:prstGeom>
           <a:solidFill>
-            <a:srgbClr val="E67F13"/>
+            <a:srgbClr val="B76426"/>
           </a:solidFill>
           <a:ln>
             <a:noFill/>
@@ -4248,7 +4248,7 @@
             <a:avLst/>
           </a:prstGeom>
           <a:solidFill>
-            <a:srgbClr val="B03424"/>
+            <a:srgbClr val="B53128"/>
           </a:solidFill>
           <a:ln>
             <a:noFill/>
